--- a/dist/초5/영어/상호작용과문화/초5_영어_상호작용과문화_03_명절과문화_학생용.pptx
+++ b/dist/초5/영어/상호작용과문화/초5_영어_상호작용과문화_03_명절과문화_학생용.pptx
@@ -119,13 +119,13 @@
   <p:extLst>
     <p:ext uri="{521415D9-36F7-43E2-AB2F-B90AF26B5E84}">
       <p14:sectionLst xmlns:p14="http://schemas.microsoft.com/office/powerpoint/2010/main">
-        <p14:section name="도입" id="{ee9d5f19-5da3-9fc9-4b12-ddcdcc6035d1}">
+        <p14:section name="도입" id="{0e8640fe-4805-513e-99b2-29500299ad21}">
           <p14:sldIdLst>
             <p14:sldId id="256"/>
             <p14:sldId id="257"/>
           </p14:sldIdLst>
         </p14:section>
-        <p14:section name="개념" id="{006532f2-f033-ab91-3dea-390726e55bb6}">
+        <p14:section name="개념" id="{b0c48204-469d-1414-6840-5ae6a83a0aa3}">
           <p14:sldIdLst>
             <p14:sldId id="258"/>
             <p14:sldId id="259"/>
@@ -133,31 +133,31 @@
             <p14:sldId id="262"/>
           </p14:sldIdLst>
         </p14:section>
-        <p14:section name="연습" id="{681ddc4c-e124-edf8-69e4-7b6551216fe0}">
+        <p14:section name="연습" id="{60b603bd-b8e3-505f-aa52-8bbb33af8a22}">
           <p14:sldIdLst>
             <p14:sldId id="261"/>
             <p14:sldId id="263"/>
             <p14:sldId id="264"/>
           </p14:sldIdLst>
         </p14:section>
-        <p14:section name="개념" id="{e6dae9d9-3191-0235-b7b7-1a39155b9b75}">
+        <p14:section name="개념" id="{e54b81ce-6672-af26-0500-db6bfb07f9bf}">
           <p14:sldIdLst/>
         </p14:section>
-        <p14:section name="연습" id="{2f447d2c-3ad1-697f-2b59-9e7d31962f43}">
+        <p14:section name="연습" id="{1dd604eb-e969-767b-38d8-ef42ee14aebf}">
           <p14:sldIdLst/>
         </p14:section>
-        <p14:section name="확인" id="{20dfb86d-ff53-4288-cb9d-d98c8f691b77}">
+        <p14:section name="확인" id="{4515af57-9dc8-5dc8-c4a1-373d26c677b8}">
           <p14:sldIdLst>
             <p14:sldId id="265"/>
             <p14:sldId id="266"/>
           </p14:sldIdLst>
         </p14:section>
-        <p14:section name="정리" id="{32937ae4-9577-f9f7-3980-4e0a1ff462a5}">
+        <p14:section name="정리" id="{9b2bf3d0-5e44-ca03-980d-d999a5cbcd33}">
           <p14:sldIdLst>
             <p14:sldId id="267"/>
           </p14:sldIdLst>
         </p14:section>
-        <p14:section name="보충" id="{0dd13990-7af1-27f3-7a82-f88636570b38}">
+        <p14:section name="보충" id="{26c09fd5-8cb4-b777-314b-ab31d11f543e}">
           <p14:sldIdLst>
             <p14:sldId id="268"/>
           </p14:sldIdLst>
